--- a/atelier/atelier-f03-open-studio-invite.pptx
+++ b/atelier/atelier-f03-open-studio-invite.pptx
@@ -3360,7 +3360,7 @@
         </p:nvSpPr>
         <p:spPr>
           <a:xfrm>
-            <a:off x="666750" y="3886349"/>
+            <a:off x="666750" y="3918347"/>
             <a:ext cx="571500" cy="19050"/>
           </a:xfrm>
           <a:prstGeom prst="rect">
@@ -3640,7 +3640,7 @@
         </p:nvSpPr>
         <p:spPr>
           <a:xfrm>
-            <a:off x="666750" y="2371576"/>
+            <a:off x="666750" y="2403574"/>
             <a:ext cx="14706600" cy="133350"/>
           </a:xfrm>
           <a:prstGeom prst="rect">
@@ -3675,7 +3675,7 @@
         </p:nvSpPr>
         <p:spPr>
           <a:xfrm>
-            <a:off x="666750" y="2657326"/>
+            <a:off x="666750" y="2689324"/>
             <a:ext cx="14706600" cy="981373"/>
           </a:xfrm>
           <a:prstGeom prst="rect">
@@ -3714,7 +3714,7 @@
         </p:nvSpPr>
         <p:spPr>
           <a:xfrm>
-            <a:off x="666750" y="4229249"/>
+            <a:off x="666750" y="4261247"/>
             <a:ext cx="4324826" cy="123825"/>
           </a:xfrm>
           <a:prstGeom prst="rect">
@@ -3749,8 +3749,8 @@
         </p:nvSpPr>
         <p:spPr>
           <a:xfrm>
-            <a:off x="666750" y="4448324"/>
-            <a:ext cx="4324826" cy="361950"/>
+            <a:off x="666750" y="4480322"/>
+            <a:ext cx="4324826" cy="297805"/>
           </a:xfrm>
           <a:prstGeom prst="rect">
             <a:avLst/>
@@ -3761,7 +3761,11 @@
           <a:bodyPr wrap="none" anchor="t" lIns="0" rIns="0" tIns="0" bIns="0"/>
           <a:lstStyle/>
           <a:p>
-            <a:pPr algn="l"/>
+            <a:pPr algn="l">
+              <a:lnSpc>
+                <a:spcPct val="92000"/>
+              </a:lnSpc>
+            </a:pPr>
             <a:r>
               <a:rPr sz="2550" i="1" b="0">
                 <a:solidFill>
@@ -3784,7 +3788,7 @@
         </p:nvSpPr>
         <p:spPr>
           <a:xfrm>
-            <a:off x="666750" y="4886474"/>
+            <a:off x="666750" y="4854327"/>
             <a:ext cx="4324826" cy="123825"/>
           </a:xfrm>
           <a:prstGeom prst="rect">
@@ -3819,7 +3823,7 @@
         </p:nvSpPr>
         <p:spPr>
           <a:xfrm>
-            <a:off x="3703141" y="4229249"/>
+            <a:off x="3703141" y="4261247"/>
             <a:ext cx="3057763" cy="123825"/>
           </a:xfrm>
           <a:prstGeom prst="rect">
@@ -3854,8 +3858,8 @@
         </p:nvSpPr>
         <p:spPr>
           <a:xfrm>
-            <a:off x="3703141" y="4448324"/>
-            <a:ext cx="3057763" cy="361950"/>
+            <a:off x="3703141" y="4480322"/>
+            <a:ext cx="3057763" cy="297805"/>
           </a:xfrm>
           <a:prstGeom prst="rect">
             <a:avLst/>
@@ -3866,7 +3870,11 @@
           <a:bodyPr wrap="none" anchor="t" lIns="0" rIns="0" tIns="0" bIns="0"/>
           <a:lstStyle/>
           <a:p>
-            <a:pPr algn="l"/>
+            <a:pPr algn="l">
+              <a:lnSpc>
+                <a:spcPct val="92000"/>
+              </a:lnSpc>
+            </a:pPr>
             <a:r>
               <a:rPr sz="2550" i="1" b="0">
                 <a:solidFill>
@@ -3889,7 +3897,7 @@
         </p:nvSpPr>
         <p:spPr>
           <a:xfrm>
-            <a:off x="3703141" y="4886474"/>
+            <a:off x="3703141" y="4854327"/>
             <a:ext cx="3057763" cy="152400"/>
           </a:xfrm>
           <a:prstGeom prst="rect">
@@ -4002,7 +4010,7 @@
         </p:blipFill>
         <p:spPr>
           <a:xfrm>
-            <a:off x="666750" y="5362724"/>
+            <a:off x="666750" y="5330577"/>
             <a:ext cx="8953500" cy="2762250"/>
           </a:xfrm>
           <a:prstGeom prst="rect">
